--- a/docs/presentation.pptx
+++ b/docs/presentation.pptx
@@ -5243,7 +5243,7 @@
                 </a:solidFill>
                 <a:latin typeface="Calibri"/>
               </a:rPr>
-              <a:t>•  Lag-1 і rolling-mean-4 — ключові ознаки.</a:t>
+              <a:t>•  Lag-1 і rolling-mean-4, ключові ознаки.</a:t>
             </a:r>
           </a:p>
           <a:p>
@@ -5300,7 +5300,7 @@
                 </a:solidFill>
                 <a:latin typeface="Calibri"/>
               </a:rPr>
-              <a:t>•  Смартфони — WAPE 21%, холодильники — 35%. Для рідкісних SKU треба окремі моделі.</a:t>
+              <a:t>•  Смартфони, WAPE 21%, холодильники, 35%. Для рідкісних SKU треба окремі моделі.</a:t>
             </a:r>
           </a:p>
         </p:txBody>
@@ -7778,7 +7778,7 @@
                 </a:solidFill>
                 <a:latin typeface="Calibri"/>
               </a:rPr>
-              <a:t>EDA — тижневі продажі по категоріях</a:t>
+              <a:t>EDA, тижневі продажі по категоріях</a:t>
             </a:r>
           </a:p>
         </p:txBody>
@@ -7922,7 +7922,7 @@
                 </a:solidFill>
                 <a:latin typeface="Calibri"/>
               </a:rPr>
-              <a:t>•  Смартфони — найбільший обсяг</a:t>
+              <a:t>•  Смартфони, найбільший обсяг</a:t>
             </a:r>
           </a:p>
           <a:p>
@@ -7941,7 +7941,7 @@
                 </a:solidFill>
                 <a:latin typeface="Calibri"/>
               </a:rPr>
-              <a:t>•  Холодильники — літній пік</a:t>
+              <a:t>•  Холодильники, літній пік</a:t>
             </a:r>
           </a:p>
           <a:p>
@@ -7960,7 +7960,7 @@
                 </a:solidFill>
                 <a:latin typeface="Calibri"/>
               </a:rPr>
-              <a:t>•  Ноутбуки — зростання у Q4</a:t>
+              <a:t>•  Ноутбуки, зростання у Q4</a:t>
             </a:r>
           </a:p>
           <a:p>
@@ -9421,7 +9421,7 @@
                 </a:solidFill>
                 <a:latin typeface="Calibri"/>
               </a:rPr>
-              <a:t>•  MAPE гіперчутливий до тижнів з малими фактичними значеннями — основна метрика WAPE</a:t>
+              <a:t>•  MAPE гіперчутливий до тижнів з малими фактичними значеннями, основна метрика WAPE</a:t>
             </a:r>
           </a:p>
         </p:txBody>
@@ -10014,7 +10014,7 @@
                 </a:solidFill>
                 <a:latin typeface="Calibri"/>
               </a:rPr>
-              <a:t>Прогноз vs факт — приклади SKU</a:t>
+              <a:t>Прогноз vs факт, приклади SKU</a:t>
             </a:r>
           </a:p>
         </p:txBody>
